--- a/site/lectures/week08-session1.pptx
+++ b/site/lectures/week08-session1.pptx
@@ -3773,6 +3773,21 @@
               <a:rPr lang="en-US" dirty="0" b="1"/>
               <a:t/>
             </a:r>
+            <a:r>
+              <a:rPr lang="en-US" dirty="0"/>
+              <a:t/>
+            </a:r>
+          </a:p>
+          <a:p>
+            <a:endParaRPr lang="en-US" dirty="0"/>
+          </a:p>
+          <a:p>
+            <a:r>
+              <a:rPr lang="en-US" dirty="0" b="1"/>
+              <a:t/>
+            </a:r>
+          </a:p>
+          <a:p>
             <a:r>
               <a:rPr lang="en-US" dirty="0"/>
               <a:t/>
@@ -6661,8 +6676,8 @@
         </p:blipFill>
         <p:spPr>
           <a:xfrm>
-            <a:off x="548640" y="1829418"/>
-            <a:ext cx="6379289" cy="3587022"/>
+            <a:off x="839025" y="1554480"/>
+            <a:ext cx="5798519" cy="4136898"/>
           </a:xfrm>
           <a:prstGeom prst="rect">
             <a:avLst/>
@@ -6678,7 +6693,7 @@
         <p:spPr>
           <a:xfrm>
             <a:off x="7293689" y="1554480"/>
-            <a:ext cx="4349366" cy="2835656"/>
+            <a:ext cx="4349366" cy="3145536"/>
           </a:xfrm>
           <a:prstGeom prst="rect">
             <a:avLst/>
@@ -6727,7 +6742,7 @@
                 <a:ea typeface="Calibri" pitchFamily="34" charset="-122"/>
                 <a:cs typeface="Calibri" pitchFamily="34" charset="-120"/>
               </a:rPr>
-              <a:t>Session 2: packages and names, the toolchain, the import, stakeholders and concerns, the Lab L8 launch</a:t>
+              <a:t>Session 2: packages and names, the toolchain, the import, stakeholders and concerns</a:t>
             </a:r>
             <a:endParaRPr lang="en-US" sz="2000" dirty="0"/>
           </a:p>
@@ -6748,7 +6763,7 @@
                 <a:ea typeface="Calibri" pitchFamily="34" charset="-122"/>
                 <a:cs typeface="Calibri" pitchFamily="34" charset="-120"/>
               </a:rPr>
-              <a:t>Your output: model v0.1 of your own enterprise</a:t>
+              <a:t>This week: Learn, Guided Practice, the Assessment, and model v0.1 of your own enterprise from the Phase I export tool</a:t>
             </a:r>
             <a:endParaRPr lang="en-US" sz="2000" dirty="0"/>
           </a:p>
@@ -6966,8 +6981,8 @@
         </p:blipFill>
         <p:spPr>
           <a:xfrm>
-            <a:off x="548640" y="1888837"/>
-            <a:ext cx="6379289" cy="3193863"/>
+            <a:off x="623254" y="1280160"/>
+            <a:ext cx="6230061" cy="4411218"/>
           </a:xfrm>
           <a:prstGeom prst="rect">
             <a:avLst/>
@@ -7313,8 +7328,8 @@
         </p:blipFill>
         <p:spPr>
           <a:xfrm>
-            <a:off x="548640" y="1840318"/>
-            <a:ext cx="6379289" cy="3290903"/>
+            <a:off x="623254" y="1280160"/>
+            <a:ext cx="6230061" cy="4411218"/>
           </a:xfrm>
           <a:prstGeom prst="rect">
             <a:avLst/>
@@ -7716,8 +7731,8 @@
         </p:blipFill>
         <p:spPr>
           <a:xfrm>
-            <a:off x="548640" y="1888837"/>
-            <a:ext cx="6379289" cy="3193863"/>
+            <a:off x="548640" y="1509220"/>
+            <a:ext cx="6379289" cy="3953098"/>
           </a:xfrm>
           <a:prstGeom prst="rect">
             <a:avLst/>
@@ -8021,8 +8036,8 @@
         </p:blipFill>
         <p:spPr>
           <a:xfrm>
-            <a:off x="548640" y="1937357"/>
-            <a:ext cx="6379289" cy="3096824"/>
+            <a:off x="548640" y="1408562"/>
+            <a:ext cx="6379289" cy="4154413"/>
           </a:xfrm>
           <a:prstGeom prst="rect">
             <a:avLst/>
@@ -8340,8 +8355,8 @@
         </p:blipFill>
         <p:spPr>
           <a:xfrm>
-            <a:off x="548640" y="1758974"/>
-            <a:ext cx="6379289" cy="3290903"/>
+            <a:off x="770857" y="1280160"/>
+            <a:ext cx="5934856" cy="4248531"/>
           </a:xfrm>
           <a:prstGeom prst="rect">
             <a:avLst/>
@@ -8612,8 +8627,8 @@
         </p:nvSpPr>
         <p:spPr>
           <a:xfrm>
-            <a:off x="548640" y="5828538"/>
-            <a:ext cx="11094415" cy="435102"/>
+            <a:off x="548640" y="5665851"/>
+            <a:ext cx="11094415" cy="597789"/>
           </a:xfrm>
           <a:prstGeom prst="rect">
             <a:avLst/>
@@ -8651,7 +8666,7 @@
                 <a:ea typeface="Calibri" pitchFamily="34" charset="-122"/>
                 <a:cs typeface="Calibri" pitchFamily="34" charset="-120"/>
               </a:rPr>
-              <a:t>Part and attribute definitions, quoted from the textual-notation training deck (slide 9).</a:t>
+              <a:t>The training deck’s Vehicle (slide 9) in the graphical notation: an attribute, a composite part and a ref part; VehicleStatus holds only data. Right: what composite and referential mean for instances.</a:t>
             </a:r>
             <a:endParaRPr lang="en-US" sz="1050" dirty="0"/>
           </a:p>
@@ -8729,7 +8744,7 @@
       </p:sp>
       <p:pic>
         <p:nvPicPr>
-          <p:cNvPr id="4" name="Image 0" descr="Listing (course file sysml/lectures/week08/deck_quotes_textual_notation.sysml, checked: PASS): part def Vehicle {     attribute mass : ScalarValues::Real;     part eng : Engine;     ref part driver : Person; } attribute def VehicleStatus {     private import ScalarValues::*;     attribute gearSetting : Integer;     attribute acceleratorPosition : Real; } part def Engine; part def Person;">    </p:cNvPr>
+          <p:cNvPr id="4" name="Image 0" descr="Left, a square-cornered box «part def» Vehicle with an attributes compartment, mass : ScalarValues::Real, and a parts compartment holding two rounded usages: «part» eng : Engine and «ref part» driver : Person. Below it, a square-cornered box «attribute def» VehicleStatus with the attributes gearSetting : Integer and acceleratorPosition : Real, and the note: VehicleStatus is data only: an attribute definition may not own a part, and attribute usages are always referential. Right, an illustration headed if a vehicle ends: a dashed vehicle outline containing an engine, crossed out, labeled the engine ends too: composite; and a person outside it with a check mark, labeled the driver goes on: referential. A footnote says the right-hand pictures show instances, an illustration, not SysML notation.">    </p:cNvPr>
           <p:cNvPicPr>
             <a:picLocks noChangeAspect="1"/>
           </p:cNvPicPr>
@@ -8743,8 +8758,8 @@
         </p:blipFill>
         <p:spPr>
           <a:xfrm>
-            <a:off x="548640" y="2006972"/>
-            <a:ext cx="6379289" cy="2957594"/>
+            <a:off x="645012" y="1280160"/>
+            <a:ext cx="6186546" cy="4248531"/>
           </a:xfrm>
           <a:prstGeom prst="rect">
             <a:avLst/>
@@ -8854,11 +8869,53 @@
                 <a:solidFill>
                   <a:srgbClr val="18202D"/>
                 </a:solidFill>
-                <a:latin typeface="Calibri" pitchFamily="34" charset="0"/>
-                <a:ea typeface="Calibri" pitchFamily="34" charset="-122"/>
-                <a:cs typeface="Calibri" pitchFamily="34" charset="-120"/>
-              </a:rPr>
-              <a:t>part: composite; ref part: referential</a:t>
+                <a:latin typeface="Consolas" pitchFamily="34" charset="0"/>
+                <a:ea typeface="Consolas" pitchFamily="34" charset="-122"/>
+                <a:cs typeface="Consolas" pitchFamily="34" charset="-120"/>
+              </a:rPr>
+              <a:t>part</a:t>
+            </a:r>
+            <a:pPr indent="0" marL="0">
+              <a:buNone/>
+            </a:pPr>
+            <a:r>
+              <a:rPr lang="en-US" sz="2000" dirty="0">
+                <a:solidFill>
+                  <a:srgbClr val="18202D"/>
+                </a:solidFill>
+                <a:latin typeface="Calibri" pitchFamily="34" charset="0"/>
+                <a:ea typeface="Calibri" pitchFamily="34" charset="-122"/>
+                <a:cs typeface="Calibri" pitchFamily="34" charset="-120"/>
+              </a:rPr>
+              <a:t>: composite, ends with its owner; </a:t>
+            </a:r>
+            <a:pPr indent="0" marL="0">
+              <a:buNone/>
+            </a:pPr>
+            <a:r>
+              <a:rPr lang="en-US" sz="2000" dirty="0">
+                <a:solidFill>
+                  <a:srgbClr val="18202D"/>
+                </a:solidFill>
+                <a:latin typeface="Consolas" pitchFamily="34" charset="0"/>
+                <a:ea typeface="Consolas" pitchFamily="34" charset="-122"/>
+                <a:cs typeface="Consolas" pitchFamily="34" charset="-120"/>
+              </a:rPr>
+              <a:t>ref part</a:t>
+            </a:r>
+            <a:pPr indent="0" marL="0">
+              <a:buNone/>
+            </a:pPr>
+            <a:r>
+              <a:rPr lang="en-US" sz="2000" dirty="0">
+                <a:solidFill>
+                  <a:srgbClr val="18202D"/>
+                </a:solidFill>
+                <a:latin typeface="Calibri" pitchFamily="34" charset="0"/>
+                <a:ea typeface="Calibri" pitchFamily="34" charset="-122"/>
+                <a:cs typeface="Calibri" pitchFamily="34" charset="-120"/>
+              </a:rPr>
+              <a:t>: referential</a:t>
             </a:r>
             <a:endParaRPr lang="en-US" sz="2000" dirty="0"/>
           </a:p>
@@ -8966,8 +9023,8 @@
         </p:nvSpPr>
         <p:spPr>
           <a:xfrm>
-            <a:off x="548640" y="5828538"/>
-            <a:ext cx="11094415" cy="435102"/>
+            <a:off x="548640" y="5665851"/>
+            <a:ext cx="11094415" cy="597789"/>
           </a:xfrm>
           <a:prstGeom prst="rect">
             <a:avLst/>
@@ -9005,7 +9062,7 @@
                 <a:ea typeface="Calibri" pitchFamily="34" charset="-122"/>
                 <a:cs typeface="Calibri" pitchFamily="34" charset="-120"/>
               </a:rPr>
-              <a:t>The AeroLink configuration as usages: twelve aircraft, values bound with their units. (AeroLink, FICTIONAL; course SysML file)</a:t>
+              <a:t>The AeroLink configuration as usages: twelve aircraft, values bound with their units. Above: NASA concept art of an air taxi at a vertiport, the kind of system the model describes (public domain; credited in the references). (AeroLink, FICTIONAL; course SysML file)</a:t>
             </a:r>
             <a:endParaRPr lang="en-US" sz="1050" dirty="0"/>
           </a:p>
@@ -9083,7 +9140,7 @@
       </p:sp>
       <p:pic>
         <p:nvPicPr>
-          <p:cNvPr id="4" name="Image 0" descr="Listing (course file sysml/week09/aerolink_l9_skeleton.sysml, checked: PASS): part aeroLink : Context::AeroLinkEnterprise {     doc /* … */     attribute :&gt;&gt; operatingDay = 16 [h];     attribute :&gt;&gt; vertiportCount = 6;     part &lt;'PHY-001'&gt; aircraft : EVTOLAircraft[12] {         attribute :&gt;&gt; seats = 4;         attribute :&gt;&gt; cruiseSpeed = 150 [km/h];         attribute :&gt;&gt; padEdgeNoise = 63.5 [dB] { doc /* … */ }     }">    </p:cNvPr>
+          <p:cNvPr id="4" name="Image 0" descr="At the top, a photograph-style NASA concept image of an electric air taxi on a rooftop vertiport, captioned: what the model describes: air taxis and vertiports. Below, two rounded usage boxes in the SysML v2 graphical notation. Left: «part» aeroLink : Context::AeroLinkEnterprise, with an attributes compartment :&gt;&gt; operatingDay = 16 [h] and :&gt;&gt; vertiportCount = 6. A line with a filled diamond at aeroLink joins it to the right box: «part» &lt;'PHY-001'&gt; aircraft : EVTOLAircraft[12], with the attributes :&gt;&gt; seats = 4, :&gt;&gt; cruiseSpeed = 150 [km/h] and :&gt;&gt; padEdgeNoise = 63.5 [dB]. Two notes underneath: [12]: multiplicity, exactly twelve aircraft; :&gt;&gt; redefines an inherited attribute and binds a value with its unit.">    </p:cNvPr>
           <p:cNvPicPr>
             <a:picLocks noChangeAspect="1"/>
           </p:cNvPicPr>
@@ -9097,8 +9154,8 @@
         </p:blipFill>
         <p:spPr>
           <a:xfrm>
-            <a:off x="548640" y="2584990"/>
-            <a:ext cx="6379289" cy="1801558"/>
+            <a:off x="838813" y="1280160"/>
+            <a:ext cx="5798943" cy="4248531"/>
           </a:xfrm>
           <a:prstGeom prst="rect">
             <a:avLst/>
@@ -9173,11 +9230,81 @@
                 <a:solidFill>
                   <a:srgbClr val="18202D"/>
                 </a:solidFill>
-                <a:latin typeface="Calibri" pitchFamily="34" charset="0"/>
-                <a:ea typeface="Calibri" pitchFamily="34" charset="-122"/>
-                <a:cs typeface="Calibri" pitchFamily="34" charset="-120"/>
-              </a:rPr>
-              <a:t>[12]: exactly twelve; [4..8]: four to eight; [1..*]: one or more</a:t>
+                <a:latin typeface="Consolas" pitchFamily="34" charset="0"/>
+                <a:ea typeface="Consolas" pitchFamily="34" charset="-122"/>
+                <a:cs typeface="Consolas" pitchFamily="34" charset="-120"/>
+              </a:rPr>
+              <a:t>[12]</a:t>
+            </a:r>
+            <a:pPr indent="0" marL="0">
+              <a:buNone/>
+            </a:pPr>
+            <a:r>
+              <a:rPr lang="en-US" sz="2000" dirty="0">
+                <a:solidFill>
+                  <a:srgbClr val="18202D"/>
+                </a:solidFill>
+                <a:latin typeface="Calibri" pitchFamily="34" charset="0"/>
+                <a:ea typeface="Calibri" pitchFamily="34" charset="-122"/>
+                <a:cs typeface="Calibri" pitchFamily="34" charset="-120"/>
+              </a:rPr>
+              <a:t>: exactly twelve; </a:t>
+            </a:r>
+            <a:pPr indent="0" marL="0">
+              <a:buNone/>
+            </a:pPr>
+            <a:r>
+              <a:rPr lang="en-US" sz="2000" dirty="0">
+                <a:solidFill>
+                  <a:srgbClr val="18202D"/>
+                </a:solidFill>
+                <a:latin typeface="Consolas" pitchFamily="34" charset="0"/>
+                <a:ea typeface="Consolas" pitchFamily="34" charset="-122"/>
+                <a:cs typeface="Consolas" pitchFamily="34" charset="-120"/>
+              </a:rPr>
+              <a:t>[4..8]</a:t>
+            </a:r>
+            <a:pPr indent="0" marL="0">
+              <a:buNone/>
+            </a:pPr>
+            <a:r>
+              <a:rPr lang="en-US" sz="2000" dirty="0">
+                <a:solidFill>
+                  <a:srgbClr val="18202D"/>
+                </a:solidFill>
+                <a:latin typeface="Calibri" pitchFamily="34" charset="0"/>
+                <a:ea typeface="Calibri" pitchFamily="34" charset="-122"/>
+                <a:cs typeface="Calibri" pitchFamily="34" charset="-120"/>
+              </a:rPr>
+              <a:t>: four to eight; </a:t>
+            </a:r>
+            <a:pPr indent="0" marL="0">
+              <a:buNone/>
+            </a:pPr>
+            <a:r>
+              <a:rPr lang="en-US" sz="2000" dirty="0">
+                <a:solidFill>
+                  <a:srgbClr val="18202D"/>
+                </a:solidFill>
+                <a:latin typeface="Consolas" pitchFamily="34" charset="0"/>
+                <a:ea typeface="Consolas" pitchFamily="34" charset="-122"/>
+                <a:cs typeface="Consolas" pitchFamily="34" charset="-120"/>
+              </a:rPr>
+              <a:t>[1..*]</a:t>
+            </a:r>
+            <a:pPr indent="0" marL="0">
+              <a:buNone/>
+            </a:pPr>
+            <a:r>
+              <a:rPr lang="en-US" sz="2000" dirty="0">
+                <a:solidFill>
+                  <a:srgbClr val="18202D"/>
+                </a:solidFill>
+                <a:latin typeface="Calibri" pitchFamily="34" charset="0"/>
+                <a:ea typeface="Calibri" pitchFamily="34" charset="-122"/>
+                <a:cs typeface="Calibri" pitchFamily="34" charset="-120"/>
+              </a:rPr>
+              <a:t>: one or more</a:t>
             </a:r>
             <a:endParaRPr lang="en-US" sz="2000" dirty="0"/>
           </a:p>
@@ -9198,7 +9325,35 @@
                 <a:ea typeface="Calibri" pitchFamily="34" charset="-122"/>
                 <a:cs typeface="Calibri" pitchFamily="34" charset="-120"/>
               </a:rPr>
-              <a:t>Owned part usage without subsetting or redefinition: 1..1 by default</a:t>
+              <a:t>Owned part usage without subsetting or redefinition: </a:t>
+            </a:r>
+            <a:pPr indent="0" marL="0">
+              <a:buNone/>
+            </a:pPr>
+            <a:r>
+              <a:rPr lang="en-US" sz="2000" dirty="0">
+                <a:solidFill>
+                  <a:srgbClr val="18202D"/>
+                </a:solidFill>
+                <a:latin typeface="Consolas" pitchFamily="34" charset="0"/>
+                <a:ea typeface="Consolas" pitchFamily="34" charset="-122"/>
+                <a:cs typeface="Consolas" pitchFamily="34" charset="-120"/>
+              </a:rPr>
+              <a:t>1..1</a:t>
+            </a:r>
+            <a:pPr indent="0" marL="0">
+              <a:buNone/>
+            </a:pPr>
+            <a:r>
+              <a:rPr lang="en-US" sz="2000" dirty="0">
+                <a:solidFill>
+                  <a:srgbClr val="18202D"/>
+                </a:solidFill>
+                <a:latin typeface="Calibri" pitchFamily="34" charset="0"/>
+                <a:ea typeface="Calibri" pitchFamily="34" charset="-122"/>
+                <a:cs typeface="Calibri" pitchFamily="34" charset="-120"/>
+              </a:rPr>
+              <a:t> by default</a:t>
             </a:r>
             <a:endParaRPr lang="en-US" sz="2000" dirty="0"/>
           </a:p>
@@ -9306,8 +9461,8 @@
         </p:nvSpPr>
         <p:spPr>
           <a:xfrm>
-            <a:off x="548640" y="5828538"/>
-            <a:ext cx="11094415" cy="435102"/>
+            <a:off x="548640" y="5665851"/>
+            <a:ext cx="11094415" cy="597789"/>
           </a:xfrm>
           <a:prstGeom prst="rect">
             <a:avLst/>
@@ -9345,7 +9500,7 @@
                 <a:ea typeface="Calibri" pitchFamily="34" charset="-122"/>
                 <a:cs typeface="Calibri" pitchFamily="34" charset="-120"/>
               </a:rPr>
-              <a:t>An abstract charger and two specializations. (AeroLink, FICTIONAL; ratings are instructor values for this listing)</a:t>
+              <a:t>An abstract charger and two specializations in the graphical notation: the hollow triangle points at the general definition. (AeroLink, FICTIONAL; ratings are instructor values)</a:t>
             </a:r>
             <a:endParaRPr lang="en-US" sz="1050" dirty="0"/>
           </a:p>
@@ -9423,7 +9578,7 @@
       </p:sp>
       <p:pic>
         <p:nvPicPr>
-          <p:cNvPr id="4" name="Image 0" descr="Listing (course file sysml/week09/aerolink_def_usage.sysml, checked: PASS): abstract part def Charger {     attribute ratedPower : PowerValue; } part def HighPowerCharger :&gt; Charger {     attribute redefines ratedPower = 350 [kW]; } part def StandardCharger :&gt; Charger {     attribute redefines ratedPower = 150 [kW]; }">    </p:cNvPr>
+          <p:cNvPr id="4" name="Image 0" descr="A taxonomy in the SysML v2 graphical notation. At the top, a square-cornered box «abstract part def» Charger with the attribute ratedPower : PowerValue. Below, two square-cornered boxes, «part def» HighPowerCharger with redefines ratedPower = 350 [kW], and «part def» StandardCharger with redefines ratedPower = 150 [kW]. Their lines join and end in one hollow triangle at Charger, labeled specializes (:&gt;). A note: abstract: every Charger is a HighPowerCharger or a StandardCharger; each inherits ratedPower and binds its own value.">    </p:cNvPr>
           <p:cNvPicPr>
             <a:picLocks noChangeAspect="1"/>
           </p:cNvPicPr>
@@ -9437,8 +9592,8 @@
         </p:blipFill>
         <p:spPr>
           <a:xfrm>
-            <a:off x="548640" y="2435212"/>
-            <a:ext cx="6379289" cy="2101115"/>
+            <a:off x="548640" y="1371148"/>
+            <a:ext cx="6379289" cy="4066556"/>
           </a:xfrm>
           <a:prstGeom prst="rect">
             <a:avLst/>
@@ -9520,11 +9675,39 @@
                 <a:solidFill>
                   <a:srgbClr val="18202D"/>
                 </a:solidFill>
-                <a:latin typeface="Calibri" pitchFamily="34" charset="0"/>
-                <a:ea typeface="Calibri" pitchFamily="34" charset="-122"/>
-                <a:cs typeface="Calibri" pitchFamily="34" charset="-120"/>
-              </a:rPr>
-              <a:t>:&gt; is the same as specializes</a:t>
+                <a:latin typeface="Consolas" pitchFamily="34" charset="0"/>
+                <a:ea typeface="Consolas" pitchFamily="34" charset="-122"/>
+                <a:cs typeface="Consolas" pitchFamily="34" charset="-120"/>
+              </a:rPr>
+              <a:t>:&gt;</a:t>
+            </a:r>
+            <a:pPr indent="0" marL="0">
+              <a:buNone/>
+            </a:pPr>
+            <a:r>
+              <a:rPr lang="en-US" sz="2000" dirty="0">
+                <a:solidFill>
+                  <a:srgbClr val="18202D"/>
+                </a:solidFill>
+                <a:latin typeface="Calibri" pitchFamily="34" charset="0"/>
+                <a:ea typeface="Calibri" pitchFamily="34" charset="-122"/>
+                <a:cs typeface="Calibri" pitchFamily="34" charset="-120"/>
+              </a:rPr>
+              <a:t> is the same as </a:t>
+            </a:r>
+            <a:pPr indent="0" marL="0">
+              <a:buNone/>
+            </a:pPr>
+            <a:r>
+              <a:rPr lang="en-US" sz="2000" dirty="0">
+                <a:solidFill>
+                  <a:srgbClr val="18202D"/>
+                </a:solidFill>
+                <a:latin typeface="Consolas" pitchFamily="34" charset="0"/>
+                <a:ea typeface="Consolas" pitchFamily="34" charset="-122"/>
+                <a:cs typeface="Consolas" pitchFamily="34" charset="-120"/>
+              </a:rPr>
+              <a:t>specializes</a:t>
             </a:r>
             <a:endParaRPr lang="en-US" sz="2000" dirty="0"/>
           </a:p>
@@ -9541,11 +9724,25 @@
                 <a:solidFill>
                   <a:srgbClr val="18202D"/>
                 </a:solidFill>
-                <a:latin typeface="Calibri" pitchFamily="34" charset="0"/>
-                <a:ea typeface="Calibri" pitchFamily="34" charset="-122"/>
-                <a:cs typeface="Calibri" pitchFamily="34" charset="-120"/>
-              </a:rPr>
-              <a:t>Abstract: every instance belongs to some specialization</a:t>
+                <a:latin typeface="Consolas" pitchFamily="34" charset="0"/>
+                <a:ea typeface="Consolas" pitchFamily="34" charset="-122"/>
+                <a:cs typeface="Consolas" pitchFamily="34" charset="-120"/>
+              </a:rPr>
+              <a:t>abstract</a:t>
+            </a:r>
+            <a:pPr indent="0" marL="0">
+              <a:buNone/>
+            </a:pPr>
+            <a:r>
+              <a:rPr lang="en-US" sz="2000" dirty="0">
+                <a:solidFill>
+                  <a:srgbClr val="18202D"/>
+                </a:solidFill>
+                <a:latin typeface="Calibri" pitchFamily="34" charset="0"/>
+                <a:ea typeface="Calibri" pitchFamily="34" charset="-122"/>
+                <a:cs typeface="Calibri" pitchFamily="34" charset="-120"/>
+              </a:rPr>
+              <a:t>: every instance belongs to some specialization</a:t>
             </a:r>
             <a:endParaRPr lang="en-US" sz="2000" dirty="0"/>
           </a:p>
@@ -9632,8 +9829,8 @@
         </p:nvSpPr>
         <p:spPr>
           <a:xfrm>
-            <a:off x="548640" y="5828538"/>
-            <a:ext cx="11094415" cy="435102"/>
+            <a:off x="548640" y="5665851"/>
+            <a:ext cx="11094415" cy="597789"/>
           </a:xfrm>
           <a:prstGeom prst="rect">
             <a:avLst/>
@@ -9671,7 +9868,7 @@
                 <a:ea typeface="Calibri" pitchFamily="34" charset="-122"/>
                 <a:cs typeface="Calibri" pitchFamily="34" charset="-120"/>
               </a:rPr>
-              <a:t>At a hub, two of the chargers are turnaround chargers; at a spoke, every charger is standard. (AeroLink, FICTIONAL)</a:t>
+              <a:t>Subsetting and redefinition as sets of values: at a hub, the turnaround chargers are among the chargers; at a spoke, the chargers are replaced by standard ones. (AeroLink, FICTIONAL)</a:t>
             </a:r>
             <a:endParaRPr lang="en-US" sz="1050" dirty="0"/>
           </a:p>
@@ -9749,7 +9946,7 @@
       </p:sp>
       <p:pic>
         <p:nvPicPr>
-          <p:cNvPr id="4" name="Image 0" descr="Listing (course file sysml/week09/aerolink_def_usage.sysml, checked: PASS): abstract part def Vertiport {     attribute pads : Natural;     part chargers : Charger[1..*]; } part def HubVertiport :&gt; Vertiport {     part turnaroundChargers : HighPowerCharger[2] subsets chargers; } part def SpokeVertiport :&gt; Vertiport {     part redefines chargers : StandardCharger[1..*]; }">    </p:cNvPr>
+          <p:cNvPr id="4" name="Image 0" descr="An illustration with two sets side by side. Left, a HubVertiport: a large oval labeled chargers [1..*] holding a smaller dashed oval labeled turnaroundChargers [2] with two HP chargers inside it, and an ellipsis for further chargers outside the smaller oval. Caption: subsets: the turnaround chargers are among the chargers; subsetting adds no chargers. Right, a SpokeVertiport: an oval labeled chargers, redefined: StandardCharger[1..*], with three S chargers and an ellipsis. Caption: redefines: replaces the inherited chargers; every charger at a spoke is standard. A key: HP a HighPowerCharger, S a StandardCharger. A footnote: sets of values, an illustration, not SysML notation.">    </p:cNvPr>
           <p:cNvPicPr>
             <a:picLocks noChangeAspect="1"/>
           </p:cNvPicPr>
@@ -9763,8 +9960,8 @@
         </p:blipFill>
         <p:spPr>
           <a:xfrm>
-            <a:off x="548640" y="2553347"/>
-            <a:ext cx="6379289" cy="1864845"/>
+            <a:off x="770857" y="1280160"/>
+            <a:ext cx="5934856" cy="4248531"/>
           </a:xfrm>
           <a:prstGeom prst="rect">
             <a:avLst/>
@@ -9933,7 +10130,63 @@
                 <a:ea typeface="Calibri" pitchFamily="34" charset="-122"/>
                 <a:cs typeface="Calibri" pitchFamily="34" charset="-120"/>
               </a:rPr>
-              <a:t>A hub with chargers[4] and turnaroundChargers[2] subsets chargers: four chargers, or six?</a:t>
+              <a:t>A hub has </a:t>
+            </a:r>
+            <a:pPr indent="0" marL="0">
+              <a:buNone/>
+            </a:pPr>
+            <a:r>
+              <a:rPr lang="en-US" sz="1700" dirty="0">
+                <a:solidFill>
+                  <a:srgbClr val="18202D"/>
+                </a:solidFill>
+                <a:latin typeface="Consolas" pitchFamily="34" charset="0"/>
+                <a:ea typeface="Consolas" pitchFamily="34" charset="-122"/>
+                <a:cs typeface="Consolas" pitchFamily="34" charset="-120"/>
+              </a:rPr>
+              <a:t>chargers[4]</a:t>
+            </a:r>
+            <a:pPr indent="0" marL="0">
+              <a:buNone/>
+            </a:pPr>
+            <a:r>
+              <a:rPr lang="en-US" sz="1700" dirty="0">
+                <a:solidFill>
+                  <a:srgbClr val="18202D"/>
+                </a:solidFill>
+                <a:latin typeface="Calibri" pitchFamily="34" charset="0"/>
+                <a:ea typeface="Calibri" pitchFamily="34" charset="-122"/>
+                <a:cs typeface="Calibri" pitchFamily="34" charset="-120"/>
+              </a:rPr>
+              <a:t>; two of them are its </a:t>
+            </a:r>
+            <a:pPr indent="0" marL="0">
+              <a:buNone/>
+            </a:pPr>
+            <a:r>
+              <a:rPr lang="en-US" sz="1700" dirty="0">
+                <a:solidFill>
+                  <a:srgbClr val="18202D"/>
+                </a:solidFill>
+                <a:latin typeface="Consolas" pitchFamily="34" charset="0"/>
+                <a:ea typeface="Consolas" pitchFamily="34" charset="-122"/>
+                <a:cs typeface="Consolas" pitchFamily="34" charset="-120"/>
+              </a:rPr>
+              <a:t>turnaroundChargers</a:t>
+            </a:r>
+            <a:pPr indent="0" marL="0">
+              <a:buNone/>
+            </a:pPr>
+            <a:r>
+              <a:rPr lang="en-US" sz="1700" dirty="0">
+                <a:solidFill>
+                  <a:srgbClr val="18202D"/>
+                </a:solidFill>
+                <a:latin typeface="Calibri" pitchFamily="34" charset="0"/>
+                <a:ea typeface="Calibri" pitchFamily="34" charset="-122"/>
+                <a:cs typeface="Calibri" pitchFamily="34" charset="-120"/>
+              </a:rPr>
+              <a:t>. Four chargers in all, or six?</a:t>
             </a:r>
             <a:endParaRPr lang="en-US" sz="1200" dirty="0"/>
           </a:p>
@@ -10059,7 +10312,7 @@
                 <a:ea typeface="Calibri" pitchFamily="34" charset="-122"/>
                 <a:cs typeface="Calibri" pitchFamily="34" charset="-120"/>
               </a:rPr>
-              <a:t>Redefinition in the textual-notation training deck (slide 12): a new name and type, and a narrower multiplicity under the same name.</a:t>
+              <a:t>The training deck’s redefinition example (slide 12) in the graphical notation: a new name and type, and a narrower multiplicity under the same name.</a:t>
             </a:r>
             <a:endParaRPr lang="en-US" sz="1050" dirty="0"/>
           </a:p>
@@ -10137,7 +10390,7 @@
       </p:sp>
       <p:pic>
         <p:nvPicPr>
-          <p:cNvPr id="4" name="Image 0" descr="Listing (course file sysml/lectures/week08/deck_quotes_textual_notation.sysml, checked: PASS): part def Vehicle {     part eng : Engine; } part def SmallVehicle :&gt; Vehicle {     part smallEng : SmallEngine redefines eng; } part def BigVehicle :&gt; Vehicle {     part bigEng : BigEngine :&gt;&gt; eng; } part def Engine {     part cyl : Cylinder[4..6]; } part def SmallEngine :&gt; Engine {     part redefines cyl[4]; } part def BigEngine :&gt; Engine {     part redefines cyl[6]; } part def Cylinder;">    </p:cNvPr>
+          <p:cNvPr id="4" name="Image 0" descr="Two taxonomies in the SysML v2 graphical notation. Left: «part def» Vehicle with the part eng : Engine; below it «part def» SmallVehicle, joined to Vehicle by a hollow-triangle line, with the part smallEng : SmallEngine redefines eng. Right: «part def» Engine with the part cyl : Cylinder[4..6]; below it «part def» SmallEngine with redefines cyl[4] and «part def» BigEngine with redefines cyl[6], both joined to Engine by one hollow-triangle line. Notes: SmallVehicle: a new name and a more specific type; SmallEngine and BigEngine: same name, 4..6 narrowed to 4 or 6; :&gt;&gt; is the same as redefines: BigVehicle has bigEng : BigEngine :&gt;&gt; eng.">    </p:cNvPr>
           <p:cNvPicPr>
             <a:picLocks noChangeAspect="1"/>
           </p:cNvPicPr>
@@ -10151,8 +10404,8 @@
         </p:blipFill>
         <p:spPr>
           <a:xfrm>
-            <a:off x="548640" y="1499009"/>
-            <a:ext cx="6379289" cy="3973520"/>
+            <a:off x="548640" y="1328670"/>
+            <a:ext cx="6379289" cy="4314198"/>
           </a:xfrm>
           <a:prstGeom prst="rect">
             <a:avLst/>
@@ -10262,11 +10515,39 @@
                 <a:solidFill>
                   <a:srgbClr val="18202D"/>
                 </a:solidFill>
-                <a:latin typeface="Calibri" pitchFamily="34" charset="0"/>
-                <a:ea typeface="Calibri" pitchFamily="34" charset="-122"/>
-                <a:cs typeface="Calibri" pitchFamily="34" charset="-120"/>
-              </a:rPr>
-              <a:t>:&gt;&gt; is the same as redefines</a:t>
+                <a:latin typeface="Consolas" pitchFamily="34" charset="0"/>
+                <a:ea typeface="Consolas" pitchFamily="34" charset="-122"/>
+                <a:cs typeface="Consolas" pitchFamily="34" charset="-120"/>
+              </a:rPr>
+              <a:t>:&gt;&gt;</a:t>
+            </a:r>
+            <a:pPr indent="0" marL="0">
+              <a:buNone/>
+            </a:pPr>
+            <a:r>
+              <a:rPr lang="en-US" sz="2000" dirty="0">
+                <a:solidFill>
+                  <a:srgbClr val="18202D"/>
+                </a:solidFill>
+                <a:latin typeface="Calibri" pitchFamily="34" charset="0"/>
+                <a:ea typeface="Calibri" pitchFamily="34" charset="-122"/>
+                <a:cs typeface="Calibri" pitchFamily="34" charset="-120"/>
+              </a:rPr>
+              <a:t> is the same as </a:t>
+            </a:r>
+            <a:pPr indent="0" marL="0">
+              <a:buNone/>
+            </a:pPr>
+            <a:r>
+              <a:rPr lang="en-US" sz="2000" dirty="0">
+                <a:solidFill>
+                  <a:srgbClr val="18202D"/>
+                </a:solidFill>
+                <a:latin typeface="Consolas" pitchFamily="34" charset="0"/>
+                <a:ea typeface="Consolas" pitchFamily="34" charset="-122"/>
+                <a:cs typeface="Consolas" pitchFamily="34" charset="-120"/>
+              </a:rPr>
+              <a:t>redefines</a:t>
             </a:r>
             <a:endParaRPr lang="en-US" sz="2000" dirty="0"/>
           </a:p>
@@ -10287,7 +10568,35 @@
                 <a:ea typeface="Calibri" pitchFamily="34" charset="-122"/>
                 <a:cs typeface="Calibri" pitchFamily="34" charset="-120"/>
               </a:rPr>
-              <a:t>Preview: you write redefinitions from Week 9</a:t>
+              <a:t>You use it this week: </a:t>
+            </a:r>
+            <a:pPr indent="0" marL="0">
+              <a:buNone/>
+            </a:pPr>
+            <a:r>
+              <a:rPr lang="en-US" sz="2000" dirty="0">
+                <a:solidFill>
+                  <a:srgbClr val="18202D"/>
+                </a:solidFill>
+                <a:latin typeface="Consolas" pitchFamily="34" charset="0"/>
+                <a:ea typeface="Consolas" pitchFamily="34" charset="-122"/>
+                <a:cs typeface="Consolas" pitchFamily="34" charset="-120"/>
+              </a:rPr>
+              <a:t>:&gt;&gt; padCount = 4</a:t>
+            </a:r>
+            <a:pPr indent="0" marL="0">
+              <a:buNone/>
+            </a:pPr>
+            <a:r>
+              <a:rPr lang="en-US" sz="2000" dirty="0">
+                <a:solidFill>
+                  <a:srgbClr val="18202D"/>
+                </a:solidFill>
+                <a:latin typeface="Calibri" pitchFamily="34" charset="0"/>
+                <a:ea typeface="Calibri" pitchFamily="34" charset="-122"/>
+                <a:cs typeface="Calibri" pitchFamily="34" charset="-120"/>
+              </a:rPr>
+              <a:t> in Guided Practice</a:t>
             </a:r>
             <a:endParaRPr lang="en-US" sz="2000" dirty="0"/>
           </a:p>
@@ -10460,7 +10769,7 @@
       </p:sp>
       <p:pic>
         <p:nvPicPr>
-          <p:cNvPr id="4" name="Image 0" descr="A grid of 9 document tiles in three rows of three. Each tile has its ID as a heading, the kind of artifact under it and one short line with the value highlighted: Data Sheet (Week 1 case facts): 20 min charge to the dispatch threshold, tagged states; REQ-SYS-001 (System requirement): charge to the dispatch threshold in 20 min, tagged states; REQ-STK-005 (Stakeholder requirement): 25 min hub turnaround = 20 min charge + 5 min pad work, tagged computes; A-007 (Assumption): 48 charges per charger per 16 h day (960 ÷ 20), tagged computes; SCN-003 (Scenario): the aircraft is charged in 20 min within the turnaround, tagged states; MOP-002 (Measure of performance): charge time to the dispatch threshold, tagged states; TPM-001 (Technical performance measure): estimate tracked against the 20 min target, tagged computes; TECH-001 (Technology assessment): high-power charging restores the battery in 20 min, tagged rests on; DEC-001 (Trade-study decision): capacity = chargers × 48 decides ALT-004, tagged rests on. One extra tile, drawn half hidden under a fold at the bottom right, is labeled the one you miss and carries a question mark.">    </p:cNvPr>
+          <p:cNvPr id="4" name="Image 0" descr="9 document tiles in three columns headed states, computes and rests on. Each tile has its ID as a heading and one short line with the value highlighted (the kind of artifact is given here in parentheses): Data Sheet (Week 1 case facts): 20 min charge to the dispatch threshold, under states; REQ-SYS-001 (System requirement): charge to the dispatch threshold in 20 min, under states; REQ-STK-005 (Stakeholder requirement): 25 min hub turnaround = 20 min charge + 5 min pad work, under computes; A-007 (Assumption): 48 charges per charger per 16 h day (960 ÷ 20), under computes; SCN-003 (Scenario): the aircraft is charged in 20 min within the turnaround, under states; MOP-002 (Measure of performance): charge time to the dispatch threshold, under states; TPM-001 (Technical performance measure): estimate tracked against the 20 min target, under computes; TECH-001 (Technology assessment): high-power charging restores the battery in 20 min, under rests on; DEC-001 (Trade-study decision): capacity = chargers × 48 decides ALT-004, under rests on. One extra tile, dashed and folded at the foot of the rests on column, is labeled the one you miss and carries a question mark.">    </p:cNvPr>
           <p:cNvPicPr>
             <a:picLocks noChangeAspect="1"/>
           </p:cNvPicPr>
@@ -10474,8 +10783,8 @@
         </p:blipFill>
         <p:spPr>
           <a:xfrm>
-            <a:off x="548640" y="1824622"/>
-            <a:ext cx="6379289" cy="3484982"/>
+            <a:off x="548640" y="1283771"/>
+            <a:ext cx="6379289" cy="4566683"/>
           </a:xfrm>
           <a:prstGeom prst="rect">
             <a:avLst/>
@@ -10841,8 +11150,8 @@
         </p:blipFill>
         <p:spPr>
           <a:xfrm>
-            <a:off x="548640" y="1791798"/>
-            <a:ext cx="6379289" cy="3387942"/>
+            <a:off x="548640" y="1367705"/>
+            <a:ext cx="6379289" cy="4236129"/>
           </a:xfrm>
           <a:prstGeom prst="rect">
             <a:avLst/>
@@ -11526,7 +11835,7 @@
                 <a:ea typeface="Calibri" pitchFamily="34" charset="-122"/>
                 <a:cs typeface="Calibri" pitchFamily="34" charset="-120"/>
               </a:rPr>
-              <a:t>The aircraft definition declares quantity kinds; the usage on the earlier slide gave the values with their units. (AeroLink, FICTIONAL; course SysML file)</a:t>
+              <a:t>The aircraft definition declares quantity kinds; the AeroLink usage binds each value with its unit. (AeroLink, FICTIONAL; course SysML files)</a:t>
             </a:r>
             <a:endParaRPr lang="en-US" sz="1050" dirty="0"/>
           </a:p>
@@ -11604,7 +11913,7 @@
       </p:sp>
       <p:pic>
         <p:nvPicPr>
-          <p:cNvPr id="4" name="Image 0" descr="Listing (course file sysml/week09/aerolink_l9_skeleton.sysml, checked: PASS): part def EVTOLAircraft {     attribute seats : Natural;     attribute cruiseSpeed : SpeedValue;     attribute padEdgeNoise : SoundPressureLevelValue; }">    </p:cNvPr>
+          <p:cNvPr id="4" name="Image 0" descr="Left, headed definition: the kind, a square-cornered box «part def» EVTOLAircraft with the attributes seats : Natural, cruiseSpeed : SpeedValue and padEdgeNoise : SoundPressureLevelValue. Right, headed usage: the value, a rounded box «part» &lt;'PHY-001'&gt; aircraft : EVTOLAircraft[12] with :&gt;&gt; seats = 4, :&gt;&gt; cruiseSpeed = 150 [km/h] and :&gt;&gt; padEdgeNoise = 63.5 [dB]. A defined-by line, ending in two dots and a hollow triangle, runs from the usage to the definition, and a dashed accent arrow joins each attribute to its value. Notes underneath: SpeedValue fixes the kind, a speed, and no unit; 150 [km/h] brings its unit with the value, so a tool can convert it. seats is a Natural: a count, not a quantity with a unit.">    </p:cNvPr>
           <p:cNvPicPr>
             <a:picLocks noChangeAspect="1"/>
           </p:cNvPicPr>
@@ -11618,8 +11927,8 @@
         </p:blipFill>
         <p:spPr>
           <a:xfrm>
-            <a:off x="548640" y="2819150"/>
-            <a:ext cx="6379289" cy="1333238"/>
+            <a:off x="548640" y="1605839"/>
+            <a:ext cx="6379289" cy="3759860"/>
           </a:xfrm>
           <a:prstGeom prst="rect">
             <a:avLst/>
@@ -11733,7 +12042,21 @@
                 <a:ea typeface="Calibri" pitchFamily="34" charset="-122"/>
                 <a:cs typeface="Calibri" pitchFamily="34" charset="-120"/>
               </a:rPr>
-              <a:t> of unit</a:t>
+              <a:t>: </a:t>
+            </a:r>
+            <a:pPr indent="0" marL="0">
+              <a:buNone/>
+            </a:pPr>
+            <a:r>
+              <a:rPr lang="en-US" sz="2000" dirty="0">
+                <a:solidFill>
+                  <a:srgbClr val="18202D"/>
+                </a:solidFill>
+                <a:latin typeface="Consolas" pitchFamily="34" charset="0"/>
+                <a:ea typeface="Consolas" pitchFamily="34" charset="-122"/>
+                <a:cs typeface="Consolas" pitchFamily="34" charset="-120"/>
+              </a:rPr>
+              <a:t>SpeedValue</a:t>
             </a:r>
             <a:endParaRPr lang="en-US" sz="2000" dirty="0"/>
           </a:p>
@@ -11754,7 +12077,21 @@
                 <a:ea typeface="Calibri" pitchFamily="34" charset="-122"/>
                 <a:cs typeface="Calibri" pitchFamily="34" charset="-120"/>
               </a:rPr>
-              <a:t>The specific unit comes with the value: 150 [km/h]</a:t>
+              <a:t>The specific unit comes with the value: </a:t>
+            </a:r>
+            <a:pPr indent="0" marL="0">
+              <a:buNone/>
+            </a:pPr>
+            <a:r>
+              <a:rPr lang="en-US" sz="2000" dirty="0">
+                <a:solidFill>
+                  <a:srgbClr val="18202D"/>
+                </a:solidFill>
+                <a:latin typeface="Consolas" pitchFamily="34" charset="0"/>
+                <a:ea typeface="Consolas" pitchFamily="34" charset="-122"/>
+                <a:cs typeface="Consolas" pitchFamily="34" charset="-120"/>
+              </a:rPr>
+              <a:t>150 [km/h]</a:t>
             </a:r>
             <a:endParaRPr lang="en-US" sz="2000" dirty="0"/>
           </a:p>
@@ -11841,8 +12178,8 @@
         </p:nvSpPr>
         <p:spPr>
           <a:xfrm>
-            <a:off x="548640" y="5828538"/>
-            <a:ext cx="11094415" cy="435102"/>
+            <a:off x="548640" y="5665851"/>
+            <a:ext cx="11094415" cy="597789"/>
           </a:xfrm>
           <a:prstGeom prst="rect">
             <a:avLst/>
@@ -11880,7 +12217,7 @@
                 <a:ea typeface="Calibri" pitchFamily="34" charset="-122"/>
                 <a:cs typeface="Calibri" pitchFamily="34" charset="-120"/>
               </a:rPr>
-              <a:t>The vertiport network as definitions and two sibling configurations: the baseline and the recommended alternative. (AeroLink, FICTIONAL; course SysML file)</a:t>
+              <a:t>The vertiport network as a definition, a package-level usage and two sibling configurations: the baseline and the recommended alternative. (AeroLink, FICTIONAL; course SysML file)</a:t>
             </a:r>
             <a:endParaRPr lang="en-US" sz="1050" dirty="0"/>
           </a:p>
@@ -11950,7 +12287,7 @@
                 <a:ea typeface="Calibri" pitchFamily="34" charset="-122"/>
                 <a:cs typeface="Calibri" pitchFamily="34" charset="-120"/>
               </a:rPr>
-              <a:t>Worked example: definitions describe kinds; usages describe configurations</a:t>
+              <a:t>Worked example: kinds and configurations</a:t>
             </a:r>
             <a:endParaRPr lang="en-US" sz="3000" dirty="0"/>
           </a:p>
@@ -11958,7 +12295,7 @@
       </p:sp>
       <p:pic>
         <p:nvPicPr>
-          <p:cNvPr id="4" name="Image 0" descr="Listing (course file sysml/week09/aerolink_def_usage.sysml, checked: PASS): part def VertiportNetwork {     part sites : Vertiport[1..*];     part hubs : HubVertiport[1..*] subsets sites;     part spokes : SpokeVertiport[0..*] subsets sites; }  part vertiportNetwork : VertiportNetwork;  part baselineNetwork :&gt; vertiportNetwork {     doc /* … */     part redefines sites[6];     part redefines hubs[3];     part redefines spokes[3]; } part alt004Network :&gt; vertiportNetwork {     doc /* … */     part redefines sites[6];     part redefines hubs[4];     part redefines spokes[2]; }">    </p:cNvPr>
+          <p:cNvPr id="4" name="Image 0" descr="Left, a square-cornered box «part def» VertiportNetwork with a parts compartment: sites : Vertiport[1..*], hubs : HubVertiport[1..*] subsets sites, spokes : SpokeVertiport[0..*] subsets sites. To its right, a rounded box «part» vertiportNetwork : VertiportNetwork, joined to the definition by a defined-by line. Below it, two rounded boxes, «part» baselineNetwork with redefines sites[6], redefines hubs[3], redefines spokes[3], and «part» alt004Network with redefines sites[6], redefines hubs[4], redefines spokes[2]; their lines join and end in one hollow triangle at vertiportNetwork, labeled subsets (:&gt;), each a sibling. Under the definition, one ring of six sites per configuration, each labeled: baseline: 3 hubs, 3 spokes, drawn as three filled circles (hubs, HubVertiport) and three hollow circles (spokes, SpokeVertiport); ALT-004: 4 hubs, 2 spokes, with the converted spoke, now the fourth hub, circled by a dashed ring. A line above the rings reads: rings of six sites: a schematic, not SysML (not a map either).">    </p:cNvPr>
           <p:cNvPicPr>
             <a:picLocks noChangeAspect="1"/>
           </p:cNvPicPr>
@@ -11972,8 +12309,8 @@
         </p:blipFill>
         <p:spPr>
           <a:xfrm>
-            <a:off x="3721539" y="1280160"/>
-            <a:ext cx="4748618" cy="2730132"/>
+            <a:off x="1744893" y="1280160"/>
+            <a:ext cx="8701909" cy="2624385"/>
           </a:xfrm>
           <a:prstGeom prst="rect">
             <a:avLst/>
@@ -11988,7 +12325,7 @@
         </p:nvSpPr>
         <p:spPr>
           <a:xfrm>
-            <a:off x="548640" y="4147452"/>
+            <a:off x="548640" y="4041705"/>
             <a:ext cx="11094415" cy="1306576"/>
           </a:xfrm>
           <a:prstGeom prst="rect">
@@ -12032,7 +12369,7 @@
                 <a:ea typeface="Calibri" pitchFamily="34" charset="-122"/>
                 <a:cs typeface="Calibri" pitchFamily="34" charset="-120"/>
               </a:rPr>
-              <a:t>Which lines define kinds of thing?</a:t>
+              <a:t>Which box defines a kind of thing?</a:t>
             </a:r>
             <a:endParaRPr lang="en-US" sz="1400" dirty="0"/>
           </a:p>
@@ -12140,7 +12477,91 @@
                 <a:ea typeface="Calibri" pitchFamily="34" charset="-122"/>
                 <a:cs typeface="Calibri" pitchFamily="34" charset="-120"/>
               </a:rPr>
-              <a:t>Two tokens: is :&gt; on line 9 subsetting or specialization? What does part redefines sites[6] do?</a:t>
+              <a:t>Two tokens: is </a:t>
+            </a:r>
+            <a:pPr indent="0" marL="0">
+              <a:buNone/>
+            </a:pPr>
+            <a:r>
+              <a:rPr lang="en-US" sz="1400" dirty="0">
+                <a:solidFill>
+                  <a:srgbClr val="18202D"/>
+                </a:solidFill>
+                <a:latin typeface="Consolas" pitchFamily="34" charset="0"/>
+                <a:ea typeface="Consolas" pitchFamily="34" charset="-122"/>
+                <a:cs typeface="Consolas" pitchFamily="34" charset="-120"/>
+              </a:rPr>
+              <a:t>:&gt;</a:t>
+            </a:r>
+            <a:pPr indent="0" marL="0">
+              <a:buNone/>
+            </a:pPr>
+            <a:r>
+              <a:rPr lang="en-US" sz="1400" dirty="0">
+                <a:solidFill>
+                  <a:srgbClr val="18202D"/>
+                </a:solidFill>
+                <a:latin typeface="Calibri" pitchFamily="34" charset="0"/>
+                <a:ea typeface="Calibri" pitchFamily="34" charset="-122"/>
+                <a:cs typeface="Calibri" pitchFamily="34" charset="-120"/>
+              </a:rPr>
+              <a:t> after </a:t>
+            </a:r>
+            <a:pPr indent="0" marL="0">
+              <a:buNone/>
+            </a:pPr>
+            <a:r>
+              <a:rPr lang="en-US" sz="1400" dirty="0">
+                <a:solidFill>
+                  <a:srgbClr val="18202D"/>
+                </a:solidFill>
+                <a:latin typeface="Consolas" pitchFamily="34" charset="0"/>
+                <a:ea typeface="Consolas" pitchFamily="34" charset="-122"/>
+                <a:cs typeface="Consolas" pitchFamily="34" charset="-120"/>
+              </a:rPr>
+              <a:t>baselineNetwork</a:t>
+            </a:r>
+            <a:pPr indent="0" marL="0">
+              <a:buNone/>
+            </a:pPr>
+            <a:r>
+              <a:rPr lang="en-US" sz="1400" dirty="0">
+                <a:solidFill>
+                  <a:srgbClr val="18202D"/>
+                </a:solidFill>
+                <a:latin typeface="Calibri" pitchFamily="34" charset="0"/>
+                <a:ea typeface="Calibri" pitchFamily="34" charset="-122"/>
+                <a:cs typeface="Calibri" pitchFamily="34" charset="-120"/>
+              </a:rPr>
+              <a:t> subsetting or specialization? What does </a:t>
+            </a:r>
+            <a:pPr indent="0" marL="0">
+              <a:buNone/>
+            </a:pPr>
+            <a:r>
+              <a:rPr lang="en-US" sz="1400" dirty="0">
+                <a:solidFill>
+                  <a:srgbClr val="18202D"/>
+                </a:solidFill>
+                <a:latin typeface="Consolas" pitchFamily="34" charset="0"/>
+                <a:ea typeface="Consolas" pitchFamily="34" charset="-122"/>
+                <a:cs typeface="Consolas" pitchFamily="34" charset="-120"/>
+              </a:rPr>
+              <a:t>part redefines sites[6]</a:t>
+            </a:r>
+            <a:pPr indent="0" marL="0">
+              <a:buNone/>
+            </a:pPr>
+            <a:r>
+              <a:rPr lang="en-US" sz="1400" dirty="0">
+                <a:solidFill>
+                  <a:srgbClr val="18202D"/>
+                </a:solidFill>
+                <a:latin typeface="Calibri" pitchFamily="34" charset="0"/>
+                <a:ea typeface="Calibri" pitchFamily="34" charset="-122"/>
+                <a:cs typeface="Calibri" pitchFamily="34" charset="-120"/>
+              </a:rPr>
+              <a:t> do?</a:t>
             </a:r>
             <a:endParaRPr lang="en-US" sz="1400" dirty="0"/>
           </a:p>
@@ -12344,7 +12765,7 @@
       </p:sp>
       <p:pic>
         <p:nvPicPr>
-          <p:cNvPr id="4" name="Image 0" descr="Three cards side by side, each with a listing and a stamp that is revealed in sequence. Card 1: package PredictPc5 {     private import ISQ::*;     block EVTOLAircraft {         attribute cruiseSpeed : SpeedValue;     } } Stamp: FAIL: line 4, “no viable alternative at input ‘EVTOLAircraft’” (a syntax error: block is not a SysML v2 keyword). Card 2: package PredictPc2 {     part def OperationsCenter;     part def MaintenanceFacility;     part aeroLink {         part &lt;'PHY-004'&gt; operationsCenter : OperationsCenter;         part &lt;'PHY-004'&gt; maintenanceFacility : MaintenanceFacility;     } } Stamp: PASS with two warnings, lines 6 and 7: “Duplicate of other owned member name”. Card 3: package PredictPc6 {     private import ScalarValues::*;     part def Charger;     attribute def ChargerStatus {         attribute available : Boolean;         part charger : Charger;     } } Stamp: PASS, no message, although an attribute definition may not have composite features. Card 3 carries an extra label: PASS, but wrong.">    </p:cNvPr>
+          <p:cNvPr id="4" name="Image 0" descr="Three cards stacked, each with the lines of its listing that decide the result, a stamp revealed in sequence and the recorded result written under it. The full listings: Card 1: package PredictPc5 {     private import ISQ::*;     block EVTOLAircraft {         attribute cruiseSpeed : SpeedValue;     } } Stamp: FAIL: line 4, “no viable alternative at input ‘EVTOLAircraft’” (a syntax error: block is not a SysML v2 keyword). Card 2: package PredictPc2 {     part def OperationsCenter;     part def MaintenanceFacility;     part aeroLink {         part &lt;'PHY-004'&gt; operationsCenter : OperationsCenter;         part &lt;'PHY-004'&gt; maintenanceFacility : MaintenanceFacility;     } } Stamp: PASS with two warnings, lines 6 and 7: “Duplicate of other owned member name”. Card 3: package PredictPc6 {     private import ScalarValues::*;     part def Charger;     attribute def ChargerStatus {         attribute available : Boolean;         part charger : Charger;     } } Stamp: PASS, no message, although an attribute definition may not have composite features. Card 3 carries an extra label: PASS, but wrong.">    </p:cNvPr>
           <p:cNvPicPr>
             <a:picLocks noChangeAspect="1"/>
           </p:cNvPicPr>
@@ -12358,8 +12779,8 @@
         </p:blipFill>
         <p:spPr>
           <a:xfrm>
-            <a:off x="548640" y="1722183"/>
-            <a:ext cx="6379289" cy="3527173"/>
+            <a:off x="712105" y="1280160"/>
+            <a:ext cx="6052358" cy="4411218"/>
           </a:xfrm>
           <a:prstGeom prst="rect">
             <a:avLst/>
@@ -12701,7 +13122,7 @@
       </p:sp>
       <p:pic>
         <p:nvPicPr>
-          <p:cNvPr id="4" name="Image 0" descr="A terminal window. The first line is the command: python -I scripts/check_sysml.py models/tool_proof_pass.sysml models/invalid_tool_proof_unquoted_id.sysml --report models/proof-report.json. The output follows, line by line: OMG SysML v2 Pilot Implementation (SysMLInteractive, Jupyter kernel jar) release 2026-08 (kernel 0.62.0), Java 21.0.12.1+1-LTS, library load … s / PASS  (expected PASS: OK)  models/tool_proof_pass.sysml / FAIL  (expected FAIL: OK)  models/invalid_tool_proof_unquoted_id.sysml / ERROR   9:12     mismatched input '-' expecting '&gt;' / ERROR   9:18     no viable alternative at input 'roadNetwork' / 2 file(s): 1 PASS, 1 FAIL, 0 ERROR. Report: models/proof-report.json. Numbered callouts mark the tool line (release and kernel), the PASS line with no message under it, the ERROR line with its line and column, and the summary line.">    </p:cNvPr>
+          <p:cNvPr id="4" name="Image 0" descr="A terminal window. The first line is the command: python -I scripts/check_sysml.py models/tool_proof_pass.sysml models/invalid_tool_proof_unquoted_id.sysml --report models/proof-report.json. The output follows, line by line: OMG SysML v2 Pilot Implementation (SysMLInteractive, Jupyter kernel jar) release 2026-08 (kernel 0.62.0), Java 21.0.12.1+1-LTS, library load … s / PASS  (expected PASS: OK)  models/tool_proof_pass.sysml / FAIL  (expected FAIL: OK)  models/invalid_tool_proof_unquoted_id.sysml / ERROR   9:12     mismatched input '-' expecting '&gt;' / ERROR   9:18     no viable alternative at input 'roadNetwork' / 2 file(s): 1 PASS, 1 FAIL, 0 ERROR. Report: models/proof-report.json. Long lines wrap with a continuation mark. Numbered badges in the left margin mark four lines, and a legend under the terminal names them: 1, tool, release and kernel; 2, PASS: no message under it; 3, ERROR line:column message; 4, summary and report file.">    </p:cNvPr>
           <p:cNvPicPr>
             <a:picLocks noChangeAspect="1"/>
           </p:cNvPicPr>
@@ -12715,8 +13136,8 @@
         </p:blipFill>
         <p:spPr>
           <a:xfrm>
-            <a:off x="548640" y="2404749"/>
-            <a:ext cx="6379289" cy="2324728"/>
+            <a:off x="548640" y="1374881"/>
+            <a:ext cx="6379289" cy="4384462"/>
           </a:xfrm>
           <a:prstGeom prst="rect">
             <a:avLst/>
@@ -12732,7 +13153,7 @@
         <p:spPr>
           <a:xfrm>
             <a:off x="7293689" y="1280160"/>
-            <a:ext cx="4349366" cy="3227832"/>
+            <a:ext cx="4349366" cy="3537712"/>
           </a:xfrm>
           <a:prstGeom prst="rect">
             <a:avLst/>
@@ -12823,7 +13244,7 @@
                 <a:ea typeface="Calibri" pitchFamily="34" charset="-122"/>
                 <a:cs typeface="Calibri" pitchFamily="34" charset="-120"/>
               </a:rPr>
-              <a:t>Install guide: Laboratory page; one installation per team</a:t>
+              <a:t>Guide: “Install and run the course checker”; one installation per team</a:t>
             </a:r>
             <a:endParaRPr lang="en-US" sz="2000" dirty="0"/>
           </a:p>
@@ -12996,7 +13417,7 @@
       </p:sp>
       <p:pic>
         <p:nvPicPr>
-          <p:cNvPr id="4" name="Image 0" descr="On the left, a ticket card with two numbered lines to complete: 1, one place your Week 7 package repeats a value; 2, in part x : A :&gt; y;, what is y? On the right, a checklist titled before Session 2 with three items, each with an empty check box: install the checker from the guide on the Laboratory page, one per team, your own optional; run both tool-proof files, PASS then FAIL at line 9; bring your Week 7 package’s list of ID kinds.">    </p:cNvPr>
+          <p:cNvPr id="4" name="Image 0" descr="On the left, a ticket card titled Exit ticket with two numbered questions, each above writing lines: 1, one place your Week 7 package repeats a value; 2, in part x : A :&gt; y;, what is y? On the right, a checklist titled before Session 2 with three items, each with an empty check box: install the checker: one per team; run both tool-proof files, with two result cards, pass file: PASS and fail file: FAIL at line 9; bring your Week 7 package’s list of ID kinds.">    </p:cNvPr>
           <p:cNvPicPr>
             <a:picLocks noChangeAspect="1"/>
           </p:cNvPicPr>
@@ -13010,8 +13431,8 @@
         </p:blipFill>
         <p:spPr>
           <a:xfrm>
-            <a:off x="548640" y="2067220"/>
-            <a:ext cx="6379289" cy="2999785"/>
+            <a:off x="548640" y="1572994"/>
+            <a:ext cx="6379289" cy="3988237"/>
           </a:xfrm>
           <a:prstGeom prst="rect">
             <a:avLst/>
@@ -13027,7 +13448,7 @@
         <p:spPr>
           <a:xfrm>
             <a:off x="7293689" y="1280160"/>
-            <a:ext cx="4349366" cy="3929888"/>
+            <a:ext cx="4349366" cy="4239768"/>
           </a:xfrm>
           <a:prstGeom prst="rect">
             <a:avLst/>
@@ -13076,7 +13497,63 @@
                 <a:ea typeface="Calibri" pitchFamily="34" charset="-122"/>
                 <a:cs typeface="Calibri" pitchFamily="34" charset="-120"/>
               </a:rPr>
-              <a:t>Ticket 2: in part x : A :&gt; y; what is y?</a:t>
+              <a:t>Ticket 2: in </a:t>
+            </a:r>
+            <a:pPr indent="0" marL="0">
+              <a:buNone/>
+            </a:pPr>
+            <a:r>
+              <a:rPr lang="en-US" sz="2000" dirty="0">
+                <a:solidFill>
+                  <a:srgbClr val="18202D"/>
+                </a:solidFill>
+                <a:latin typeface="Consolas" pitchFamily="34" charset="0"/>
+                <a:ea typeface="Consolas" pitchFamily="34" charset="-122"/>
+                <a:cs typeface="Consolas" pitchFamily="34" charset="-120"/>
+              </a:rPr>
+              <a:t>part x : A :&gt; y;</a:t>
+            </a:r>
+            <a:pPr indent="0" marL="0">
+              <a:buNone/>
+            </a:pPr>
+            <a:r>
+              <a:rPr lang="en-US" sz="2000" dirty="0">
+                <a:solidFill>
+                  <a:srgbClr val="18202D"/>
+                </a:solidFill>
+                <a:latin typeface="Calibri" pitchFamily="34" charset="0"/>
+                <a:ea typeface="Calibri" pitchFamily="34" charset="-122"/>
+                <a:cs typeface="Calibri" pitchFamily="34" charset="-120"/>
+              </a:rPr>
+              <a:t> what is </a:t>
+            </a:r>
+            <a:pPr indent="0" marL="0">
+              <a:buNone/>
+            </a:pPr>
+            <a:r>
+              <a:rPr lang="en-US" sz="2000" dirty="0">
+                <a:solidFill>
+                  <a:srgbClr val="18202D"/>
+                </a:solidFill>
+                <a:latin typeface="Consolas" pitchFamily="34" charset="0"/>
+                <a:ea typeface="Consolas" pitchFamily="34" charset="-122"/>
+                <a:cs typeface="Consolas" pitchFamily="34" charset="-120"/>
+              </a:rPr>
+              <a:t>y</a:t>
+            </a:r>
+            <a:pPr indent="0" marL="0">
+              <a:buNone/>
+            </a:pPr>
+            <a:r>
+              <a:rPr lang="en-US" sz="2000" dirty="0">
+                <a:solidFill>
+                  <a:srgbClr val="18202D"/>
+                </a:solidFill>
+                <a:latin typeface="Calibri" pitchFamily="34" charset="0"/>
+                <a:ea typeface="Calibri" pitchFamily="34" charset="-122"/>
+                <a:cs typeface="Calibri" pitchFamily="34" charset="-120"/>
+              </a:rPr>
+              <a:t>?</a:t>
             </a:r>
             <a:endParaRPr lang="en-US" sz="2000" dirty="0"/>
           </a:p>
@@ -13097,7 +13574,7 @@
                 <a:ea typeface="Calibri" pitchFamily="34" charset="-122"/>
                 <a:cs typeface="Calibri" pitchFamily="34" charset="-120"/>
               </a:rPr>
-              <a:t>Before Session 2: one checker installation per team (install guide, Laboratory page)</a:t>
+              <a:t>Before Session 2: one checker installation per team (guide: “Install and run the course checker”)</a:t>
             </a:r>
             <a:endParaRPr lang="en-US" sz="2000" dirty="0"/>
           </a:p>
@@ -13551,7 +14028,7 @@
               <a:buNone/>
             </a:pPr>
             <a:r>
-              <a:rPr lang="en-US" sz="1200" b="1" spc="100" kern="0" dirty="0">
+              <a:rPr lang="en-US" sz="1050" b="1" spc="100" kern="0" dirty="0">
                 <a:solidFill>
                   <a:srgbClr val="18202D"/>
                 </a:solidFill>
@@ -13561,7 +14038,7 @@
               </a:rPr>
               <a:t>CREDITS AND LICENSES</a:t>
             </a:r>
-            <a:endParaRPr lang="en-US" sz="1200" dirty="0"/>
+            <a:endParaRPr lang="en-US" sz="1050" dirty="0"/>
           </a:p>
           <a:p>
             <a:pPr marL="152400" indent="-152400">
@@ -13572,7 +14049,7 @@
               <a:buChar char="■"/>
             </a:pPr>
             <a:r>
-              <a:rPr lang="en-US" sz="1200" dirty="0">
+              <a:rPr lang="en-US" sz="1050" dirty="0">
                 <a:solidFill>
                   <a:srgbClr val="18202D"/>
                 </a:solidFill>
@@ -13582,7 +14059,7 @@
               </a:rPr>
               <a:t>Introduction to the SysML v2 Language, Textual Notation (Release 2026-08): Copyright © 2019–2026 Model Driven Solutions, Inc. Licensed under the Creative Commons Attribution 4.0 International License (CC BY 4.0).</a:t>
             </a:r>
-            <a:endParaRPr lang="en-US" sz="1200" dirty="0"/>
+            <a:endParaRPr lang="en-US" sz="1050" dirty="0"/>
           </a:p>
           <a:p>
             <a:pPr marL="152400" indent="-152400">
@@ -13593,7 +14070,7 @@
               <a:buChar char="■"/>
             </a:pPr>
             <a:r>
-              <a:rPr lang="en-US" sz="1200" dirty="0">
+              <a:rPr lang="en-US" sz="1050" dirty="0">
                 <a:solidFill>
                   <a:srgbClr val="18202D"/>
                 </a:solidFill>
@@ -13603,7 +14080,7 @@
               </a:rPr>
               <a:t>SEBoK v2.14: “This material is used under a Creative Commons Attribution-NonCommercial ShareAlike 3.0 Unported License from The Trustees of the Stevens Institute of Technology.” (SEBoK, “Bkcase Wiki:Copyright”, PDF p.31). Quotations are short and cited; no SEBoK figure or table is reproduced.</a:t>
             </a:r>
-            <a:endParaRPr lang="en-US" sz="1200" dirty="0"/>
+            <a:endParaRPr lang="en-US" sz="1050" dirty="0"/>
           </a:p>
           <a:p>
             <a:pPr marL="152400" indent="-152400">
@@ -13614,17 +14091,17 @@
               <a:buChar char="■"/>
             </a:pPr>
             <a:r>
-              <a:rPr lang="en-US" sz="1200" dirty="0">
-                <a:solidFill>
-                  <a:srgbClr val="18202D"/>
-                </a:solidFill>
-                <a:latin typeface="Calibri" pitchFamily="34" charset="0"/>
-                <a:ea typeface="Calibri" pitchFamily="34" charset="-122"/>
-                <a:cs typeface="Calibri" pitchFamily="34" charset="-120"/>
-              </a:rPr>
-              <a:t>Figures are original drawings for this course; none redraws a figure from the sources.</a:t>
-            </a:r>
-            <a:endParaRPr lang="en-US" sz="1200" dirty="0"/>
+              <a:rPr lang="en-US" sz="1050" dirty="0">
+                <a:solidFill>
+                  <a:srgbClr val="18202D"/>
+                </a:solidFill>
+                <a:latin typeface="Calibri" pitchFamily="34" charset="0"/>
+                <a:ea typeface="Calibri" pitchFamily="34" charset="-122"/>
+                <a:cs typeface="Calibri" pitchFamily="34" charset="-120"/>
+              </a:rPr>
+              <a:t>Figures are original drawings for this course, except the photographs credited here; none redraws a figure from the sources.</a:t>
+            </a:r>
+            <a:endParaRPr lang="en-US" sz="1050" dirty="0"/>
           </a:p>
           <a:p>
             <a:pPr marL="152400" indent="-152400">
@@ -13635,7 +14112,7 @@
               <a:buChar char="■"/>
             </a:pPr>
             <a:r>
-              <a:rPr lang="en-US" sz="1200" dirty="0">
+              <a:rPr lang="en-US" sz="1050" dirty="0">
                 <a:solidFill>
                   <a:srgbClr val="18202D"/>
                 </a:solidFill>
@@ -13645,7 +14122,28 @@
               </a:rPr>
               <a:t>AeroLink Urban Mobility is a fictional teaching case: every number, name and statement about it is a teaching value.</a:t>
             </a:r>
-            <a:endParaRPr lang="en-US" sz="1200" dirty="0"/>
+            <a:endParaRPr lang="en-US" sz="1050" dirty="0"/>
+          </a:p>
+          <a:p>
+            <a:pPr marL="152400" indent="-152400">
+              <a:spcBef>
+                <a:spcPts val="400"/>
+              </a:spcBef>
+              <a:buSzPct val="100000"/>
+              <a:buChar char="■"/>
+            </a:pPr>
+            <a:r>
+              <a:rPr lang="en-US" sz="1050" dirty="0">
+                <a:solidFill>
+                  <a:srgbClr val="18202D"/>
+                </a:solidFill>
+                <a:latin typeface="Calibri" pitchFamily="34" charset="0"/>
+                <a:ea typeface="Calibri" pitchFamily="34" charset="-122"/>
+                <a:cs typeface="Calibri" pitchFamily="34" charset="-120"/>
+              </a:rPr>
+              <a:t>Photograph in the figure “The AeroLink usage and the thing it describes”: “Vertiport CU rev3”, artist concept by NASA Headquarters (Lillian Gipson and Kyle Jenkins), 2021, https://commons.wikimedia.org/wiki/File:Vertiport_CU_rev3.jpg (NASA photo ID vertiport_CU_rev3). Public domain in the United States (created solely by NASA); no endorsement by NASA is implied.</a:t>
+            </a:r>
+            <a:endParaRPr lang="en-US" sz="1050" dirty="0"/>
           </a:p>
         </p:txBody>
       </p:sp>
@@ -13830,8 +14328,8 @@
         </p:blipFill>
         <p:spPr>
           <a:xfrm>
-            <a:off x="548640" y="2041906"/>
-            <a:ext cx="6379289" cy="3050414"/>
+            <a:off x="548640" y="1614930"/>
+            <a:ext cx="6379289" cy="3904365"/>
           </a:xfrm>
           <a:prstGeom prst="rect">
             <a:avLst/>
@@ -14177,8 +14675,8 @@
         </p:blipFill>
         <p:spPr>
           <a:xfrm>
-            <a:off x="548640" y="1710454"/>
-            <a:ext cx="6379289" cy="3387942"/>
+            <a:off x="750721" y="1280160"/>
+            <a:ext cx="5975126" cy="4248531"/>
           </a:xfrm>
           <a:prstGeom prst="rect">
             <a:avLst/>
@@ -14608,8 +15106,8 @@
         </p:blipFill>
         <p:spPr>
           <a:xfrm>
-            <a:off x="548640" y="1856013"/>
-            <a:ext cx="6379289" cy="3096824"/>
+            <a:off x="548640" y="1393925"/>
+            <a:ext cx="6379289" cy="4021001"/>
           </a:xfrm>
           <a:prstGeom prst="rect">
             <a:avLst/>
@@ -14976,8 +15474,8 @@
         </p:blipFill>
         <p:spPr>
           <a:xfrm>
-            <a:off x="548640" y="1817112"/>
-            <a:ext cx="6379289" cy="3337313"/>
+            <a:off x="636320" y="1280160"/>
+            <a:ext cx="6203929" cy="4411218"/>
           </a:xfrm>
           <a:prstGeom prst="rect">
             <a:avLst/>
@@ -15386,8 +15884,8 @@
         </p:blipFill>
         <p:spPr>
           <a:xfrm>
-            <a:off x="548640" y="1888837"/>
-            <a:ext cx="6379289" cy="3193863"/>
+            <a:off x="548640" y="1318249"/>
+            <a:ext cx="6379289" cy="4335040"/>
           </a:xfrm>
           <a:prstGeom prst="rect">
             <a:avLst/>
@@ -15747,8 +16245,8 @@
         </p:blipFill>
         <p:spPr>
           <a:xfrm>
-            <a:off x="548640" y="1791798"/>
-            <a:ext cx="6379289" cy="3387942"/>
+            <a:off x="548640" y="1450954"/>
+            <a:ext cx="6379289" cy="4069629"/>
           </a:xfrm>
           <a:prstGeom prst="rect">
             <a:avLst/>
@@ -16135,8 +16633,8 @@
         </p:blipFill>
         <p:spPr>
           <a:xfrm>
-            <a:off x="548640" y="1768593"/>
-            <a:ext cx="6379289" cy="3434353"/>
+            <a:off x="657226" y="1280160"/>
+            <a:ext cx="6162116" cy="4411218"/>
           </a:xfrm>
           <a:prstGeom prst="rect">
             <a:avLst/>
